--- a/curso/pptx/S77.pptx
+++ b/curso/pptx/S77.pptx
@@ -3800,7 +3800,7 @@
                 </a:solidFill>
                 <a:latin typeface="Nunito Sans"/>
               </a:rPr>
-              <a:t>Enfadada, Naiara escribe en privado a Yasmin: «Leire es una pesada». Yasmin hace una captura y la sube al grupo de clase.</a:t>
+              <a:t>Enfadada, una chica escribe en privado a una amiga: «Una compañera es una pesada». La amiga hace una captura y la sube al chat del equipo de balonmano.</a:t>
             </a:r>
           </a:p>
         </p:txBody>
@@ -3848,7 +3848,7 @@
                 </a:solidFill>
                 <a:latin typeface="Nunito Sans"/>
               </a:rPr>
-              <a:t>Naiara escribió en caliente (sesión 75), pero en privado.</a:t>
+              <a:t>La chica escribió en caliente (sesión 75), pero en privado.</a:t>
             </a:r>
           </a:p>
           <a:p>
@@ -3873,7 +3873,7 @@
                 </a:solidFill>
                 <a:latin typeface="Nunito Sans"/>
               </a:rPr>
-              <a:t>Yasmin ha roto la privacidad de Naiara: el mensaje era para ella sola.</a:t>
+              <a:t>La amiga ha roto la privacidad de la chica: el mensaje era para ella sola.</a:t>
             </a:r>
           </a:p>
           <a:p>
@@ -3898,7 +3898,7 @@
                 </a:solidFill>
                 <a:latin typeface="Nunito Sans"/>
               </a:rPr>
-              <a:t>Ahora lo lee toda la clase, Leire incluida. Sin cara, sin tono y guardado: el conflicto crece.</a:t>
+              <a:t>Ahora lo lee toda la clase, incluida la compañera de la que hablaba. Sin cara, sin tono y guardado: el conflicto crece.</a:t>
             </a:r>
           </a:p>
           <a:p>
@@ -4109,7 +4109,7 @@
                 </a:solidFill>
                 <a:latin typeface="Nunito Sans"/>
               </a:rPr>
-              <a:t>Una cuenta sin foto ni nombre comenta cada foto de Omar: «Qué pintas», «Nadie te aguanta». Lleva así tres semanas.</a:t>
+              <a:t>Una cuenta sin foto ni nombre comenta cada foto de un chico: «Qué pintas», «Nadie te aguanta». Lleva así tres semanas.</a:t>
             </a:r>
           </a:p>
         </p:txBody>
@@ -4182,7 +4182,7 @@
                 </a:solidFill>
                 <a:latin typeface="Nunito Sans"/>
               </a:rPr>
-              <a:t>¿Repetición? Sí: tres semanas. ¿Desequilibrio? Sí: Omar no sabe quién es.</a:t>
+              <a:t>¿Repetición? Sí: tres semanas. ¿Desequilibrio? Sí: el chico no sabe quién es.</a:t>
             </a:r>
           </a:p>
           <a:p>
@@ -4207,7 +4207,7 @@
                 </a:solidFill>
                 <a:latin typeface="Nunito Sans"/>
               </a:rPr>
-              <a:t>Es ciberacoso. Omar no debe contestar en caliente: guarda capturas, bloquea y lo denuncia.</a:t>
+              <a:t>Es ciberacoso. Ese chico no debe contestar en caliente: guarda capturas, bloquea y lo denuncia.</a:t>
             </a:r>
           </a:p>
           <a:p>
@@ -4418,7 +4418,7 @@
                 </a:solidFill>
                 <a:latin typeface="Nunito Sans"/>
               </a:rPr>
-              <a:t>Dylan graba a Chen tropezando en el patio, le pone música graciosa y lo sube. Muchos se ríen. Dylan dice: «Solo era una broma».</a:t>
+              <a:t>Un chico graba a otro fallando un tiro en el partido, le pone música graciosa y lo sube. Muchos se ríen. El primero dice: «Solo era una broma».</a:t>
             </a:r>
           </a:p>
         </p:txBody>
@@ -4466,7 +4466,7 @@
                 </a:solidFill>
                 <a:latin typeface="Nunito Sans"/>
               </a:rPr>
-              <a:t>Si Dylan lo hizo de broma, ¿no pasa nada?</a:t>
+              <a:t>Si lo hizo de broma, ¿no pasa nada?</a:t>
             </a:r>
           </a:p>
           <a:p>
@@ -4491,7 +4491,7 @@
                 </a:solidFill>
                 <a:latin typeface="Nunito Sans"/>
               </a:rPr>
-              <a:t>Parece que no: Dylan no quería hacer daño y la gente se ríe.</a:t>
+              <a:t>Parece que no: no quería hacer daño y la gente se ríe.</a:t>
             </a:r>
           </a:p>
           <a:p>
@@ -4516,7 +4516,7 @@
                 </a:solidFill>
                 <a:latin typeface="Nunito Sans"/>
               </a:rPr>
-              <a:t>Pero ¿se ríe Chen? ¿Dio permiso? Su imagen es suya.</a:t>
+              <a:t>Pero ¿se ríe el otro? ¿Dio permiso? Su imagen es suya.</a:t>
             </a:r>
           </a:p>
           <a:p>
@@ -4566,7 +4566,7 @@
                 </a:solidFill>
                 <a:latin typeface="Nunito Sans"/>
               </a:rPr>
-              <a:t>Conclusión: la intención no borra el daño. Sin permiso, subir el vídeo no respeta a Chen.</a:t>
+              <a:t>Conclusión: la intención no borra el daño. Sin permiso, subir el vídeo no respeta al otro.</a:t>
             </a:r>
           </a:p>
         </p:txBody>
@@ -6493,7 +6493,7 @@
                 </a:solidFill>
                 <a:latin typeface="Nunito Sans"/>
               </a:rPr>
-              <a:t>Alguien hace una captura de un audio privado de Maialen y la sube al grupo de clase. En diez minutos la han visto sesenta personas.</a:t>
+              <a:t>Alguien hace una captura de un audio privado de una chica y la sube al chat del equipo de balonmano. En diez minutos la han visto sesenta personas.</a:t>
             </a:r>
           </a:p>
         </p:txBody>

--- a/curso/pptx/S77.pptx
+++ b/curso/pptx/S77.pptx
@@ -22,7 +22,6 @@
     <p:sldId id="270" r:id="rId22"/>
     <p:sldId id="271" r:id="rId23"/>
     <p:sldId id="272" r:id="rId24"/>
-    <p:sldId id="273" r:id="rId25"/>
   </p:sldIdLst>
   <p:sldSz cx="12192000" cy="6858000" type="screen4x3"/>
   <p:notesSz cx="6858000" cy="9144000"/>
@@ -3536,7 +3535,7 @@
                 </a:solidFill>
                 <a:latin typeface="Nunito Sans"/>
               </a:rPr>
-              <a:t>PENSAMIENTO CRÍTICO · SESIÓN 77 · UNIDAD 16 · EMOCIONES Y CONFLICTOS</a:t>
+              <a:t>PENSAMIENTO CRÍTICO · SESIÓN 77 · UNIDAD 16 · AMISTAD, AMOR Y FAMILIAS</a:t>
             </a:r>
           </a:p>
         </p:txBody>
@@ -3575,7 +3574,7 @@
                 </a:solidFill>
                 <a:latin typeface="Fredoka"/>
               </a:rPr>
-              <a:t>Conflictos en las redes</a:t>
+              <a:t>Familias diversas</a:t>
             </a:r>
           </a:p>
         </p:txBody>
@@ -3614,7 +3613,7 @@
                 </a:solidFill>
                 <a:latin typeface="Nunito Sans"/>
               </a:rPr>
-              <a:t>En las redes los conflictos crecen más porque no hay cara y todo queda guardado y a la vista; allí también hay derechos y deberes.</a:t>
+              <a:t>Hay muchos modelos de familia; lo común es el cuidado y el vínculo. Tomar la mía como «la normal» es generalizar deprisa.</a:t>
             </a:r>
           </a:p>
         </p:txBody>
@@ -3718,7 +3717,7 @@
                 </a:solidFill>
                 <a:latin typeface="Fredoka"/>
               </a:rPr>
-              <a:t>Caso 1 · La captura</a:t>
+              <a:t>Caso 1 · «Las familias normales»</a:t>
             </a:r>
           </a:p>
         </p:txBody>
@@ -3800,7 +3799,7 @@
                 </a:solidFill>
                 <a:latin typeface="Nunito Sans"/>
               </a:rPr>
-              <a:t>Enfadada, una chica escribe en privado a una amiga: «Una compañera es una pesada». La amiga hace una captura y la sube al chat del equipo de balonmano.</a:t>
+              <a:t>Un chico vive con su madre y su abuela. En clase oye: «Las familias normales son padre, madre e hijos». Se siente raro. (Ejemplo inventado.)</a:t>
             </a:r>
           </a:p>
         </p:txBody>
@@ -3848,7 +3847,7 @@
                 </a:solidFill>
                 <a:latin typeface="Nunito Sans"/>
               </a:rPr>
-              <a:t>La chica escribió en caliente (sesión 75), pero en privado.</a:t>
+              <a:t>¿Cómo lo sabe quien lo dice? Seguramente mira su casa y la de sus amigos.</a:t>
             </a:r>
           </a:p>
           <a:p>
@@ -3873,7 +3872,25 @@
                 </a:solidFill>
                 <a:latin typeface="Nunito Sans"/>
               </a:rPr>
-              <a:t>La amiga ha roto la privacidad de la chica: el mensaje era para ella sola.</a:t>
+              <a:t>Pocos casos y poco variados: es una </a:t>
+            </a:r>
+            <a:r>
+              <a:rPr sz="2400" b="1">
+                <a:solidFill>
+                  <a:srgbClr val="1F2A44"/>
+                </a:solidFill>
+                <a:latin typeface="Nunito Sans"/>
+              </a:rPr>
+              <a:t>generalización apresurada</a:t>
+            </a:r>
+            <a:r>
+              <a:rPr sz="2400" b="0">
+                <a:solidFill>
+                  <a:srgbClr val="1F2A44"/>
+                </a:solidFill>
+                <a:latin typeface="Nunito Sans"/>
+              </a:rPr>
+              <a:t> (sesión 25).</a:t>
             </a:r>
           </a:p>
           <a:p>
@@ -3898,7 +3915,7 @@
                 </a:solidFill>
                 <a:latin typeface="Nunito Sans"/>
               </a:rPr>
-              <a:t>Ahora lo lee toda la clase, incluida la compañera de la que hablaba. Sin cara, sin tono y guardado: el conflicto crece.</a:t>
+              <a:t>En cualquier instituto de Bilbao hay familias de muchos tipos.</a:t>
             </a:r>
           </a:p>
           <a:p>
@@ -3923,7 +3940,7 @@
                 </a:solidFill>
                 <a:latin typeface="Nunito Sans"/>
               </a:rPr>
-              <a:t>Conclusión: quien reenvía también es responsable. Reenviar no es neutral.</a:t>
+              <a:t>Conclusión: la familia de ese chico no es menos familia. Hay cuidado y hay vínculo.</a:t>
             </a:r>
           </a:p>
         </p:txBody>
@@ -4027,7 +4044,7 @@
                 </a:solidFill>
                 <a:latin typeface="Fredoka"/>
               </a:rPr>
-              <a:t>Caso 2 · La cuenta sin nombre</a:t>
+              <a:t>Caso 2 · Discutir por el baño</a:t>
             </a:r>
           </a:p>
         </p:txBody>
@@ -4109,7 +4126,7 @@
                 </a:solidFill>
                 <a:latin typeface="Nunito Sans"/>
               </a:rPr>
-              <a:t>Una cuenta sin foto ni nombre comenta cada foto de un chico: «Qué pintas», «Nadie te aguanta». Lleva así tres semanas.</a:t>
+              <a:t>Un chico vive con su madre, la pareja de ella y las dos hijas de esa pareja. Discuten por el baño y por el mando de la tele. (Ejemplo inventado.)</a:t>
             </a:r>
           </a:p>
         </p:txBody>
@@ -4157,7 +4174,25 @@
                 </a:solidFill>
                 <a:latin typeface="Nunito Sans"/>
               </a:rPr>
-              <a:t>¿Intención de hacer daño? Sí: los comentarios buscan humillar.</a:t>
+              <a:t>Tipo de familia: </a:t>
+            </a:r>
+            <a:r>
+              <a:rPr sz="2400" b="1">
+                <a:solidFill>
+                  <a:srgbClr val="1F2A44"/>
+                </a:solidFill>
+                <a:latin typeface="Nunito Sans"/>
+              </a:rPr>
+              <a:t>reconstituida</a:t>
+            </a:r>
+            <a:r>
+              <a:rPr sz="2400" b="0">
+                <a:solidFill>
+                  <a:srgbClr val="1F2A44"/>
+                </a:solidFill>
+                <a:latin typeface="Nunito Sans"/>
+              </a:rPr>
+              <a:t>.</a:t>
             </a:r>
           </a:p>
           <a:p>
@@ -4182,7 +4217,7 @@
                 </a:solidFill>
                 <a:latin typeface="Nunito Sans"/>
               </a:rPr>
-              <a:t>¿Repetición? Sí: tres semanas. ¿Desequilibrio? Sí: el chico no sabe quién es.</a:t>
+              <a:t>¿Discutir significa que no es una familia de verdad? No: en todas las familias hay conflictos.</a:t>
             </a:r>
           </a:p>
           <a:p>
@@ -4207,7 +4242,7 @@
                 </a:solidFill>
                 <a:latin typeface="Nunito Sans"/>
               </a:rPr>
-              <a:t>Es ciberacoso. Ese chico no debe contestar en caliente: guarda capturas, bloquea y lo denuncia.</a:t>
+              <a:t>Lo importante es cómo se resuelven: hablar, normas claras y respeto.</a:t>
             </a:r>
           </a:p>
           <a:p>
@@ -4232,7 +4267,7 @@
                 </a:solidFill>
                 <a:latin typeface="Nunito Sans"/>
               </a:rPr>
-              <a:t>Conclusión: el ciberacoso no se aguanta solo. Hay que contárselo a un adulto de confianza.</a:t>
+              <a:t>Conclusión: el conflicto no rompe la familia. Cuenta cómo se tratan.</a:t>
             </a:r>
           </a:p>
         </p:txBody>
@@ -4246,6 +4281,488 @@
 </file>
 
 <file path=ppt/slides/slide12.xml><?xml version="1.0" encoding="utf-8"?>
+<p:sld xmlns:a="http://schemas.openxmlformats.org/drawingml/2006/main" xmlns:p="http://schemas.openxmlformats.org/presentationml/2006/main" xmlns:r="http://schemas.openxmlformats.org/officeDocument/2006/relationships">
+  <p:cSld>
+    <p:bg>
+      <p:bgPr>
+        <a:solidFill>
+          <a:srgbClr val="FBF7EF"/>
+        </a:solidFill>
+        <a:effectLst/>
+      </p:bgPr>
+    </p:bg>
+    <p:spTree>
+      <p:nvGrpSpPr>
+        <p:cNvPr id="1" name=""/>
+        <p:cNvGrpSpPr/>
+        <p:nvPr/>
+      </p:nvGrpSpPr>
+      <p:grpSpPr/>
+      <p:sp>
+        <p:nvSpPr>
+          <p:cNvPr id="2" name="TextBox 1"/>
+          <p:cNvSpPr txBox="1"/>
+          <p:nvPr/>
+        </p:nvSpPr>
+        <p:spPr>
+          <a:xfrm>
+            <a:off x="640000" y="380000"/>
+            <a:ext cx="10912000" cy="420000"/>
+          </a:xfrm>
+          <a:prstGeom prst="rect">
+            <a:avLst/>
+          </a:prstGeom>
+          <a:noFill/>
+        </p:spPr>
+        <p:txBody>
+          <a:bodyPr wrap="square">
+            <a:spAutoFit/>
+          </a:bodyPr>
+          <a:lstStyle/>
+          <a:p>
+            <a:pPr>
+              <a:spcAft>
+                <a:spcPts val="630"/>
+              </a:spcAft>
+            </a:pPr>
+            <a:r>
+              <a:rPr sz="1400" b="1">
+                <a:solidFill>
+                  <a:srgbClr val="E8793A"/>
+                </a:solidFill>
+                <a:latin typeface="Nunito Sans"/>
+              </a:rPr>
+              <a:t>BLOQUE 2 · CASOS RESUELTOS</a:t>
+            </a:r>
+          </a:p>
+        </p:txBody>
+      </p:sp>
+      <p:sp>
+        <p:nvSpPr>
+          <p:cNvPr id="3" name="TextBox 2"/>
+          <p:cNvSpPr txBox="1"/>
+          <p:nvPr/>
+        </p:nvSpPr>
+        <p:spPr>
+          <a:xfrm>
+            <a:off x="640000" y="760000"/>
+            <a:ext cx="10912000" cy="800000"/>
+          </a:xfrm>
+          <a:prstGeom prst="rect">
+            <a:avLst/>
+          </a:prstGeom>
+          <a:noFill/>
+        </p:spPr>
+        <p:txBody>
+          <a:bodyPr wrap="square">
+            <a:spAutoFit/>
+          </a:bodyPr>
+          <a:lstStyle/>
+          <a:p>
+            <a:pPr>
+              <a:spcAft>
+                <a:spcPts val="1710"/>
+              </a:spcAft>
+            </a:pPr>
+            <a:r>
+              <a:rPr sz="3800" b="1">
+                <a:solidFill>
+                  <a:srgbClr val="1F2A44"/>
+                </a:solidFill>
+                <a:latin typeface="Fredoka"/>
+              </a:rPr>
+              <a:t>Pensar sobre las familias</a:t>
+            </a:r>
+          </a:p>
+        </p:txBody>
+      </p:sp>
+      <p:sp>
+        <p:nvSpPr>
+          <p:cNvPr id="4" name="Rectangle 3"/>
+          <p:cNvSpPr/>
+          <p:nvPr/>
+        </p:nvSpPr>
+        <p:spPr>
+          <a:xfrm>
+            <a:off x="640000" y="1650000"/>
+            <a:ext cx="5306000" cy="4400000"/>
+          </a:xfrm>
+          <a:prstGeom prst="rect">
+            <a:avLst/>
+          </a:prstGeom>
+          <a:solidFill>
+            <a:srgbClr val="FBE3D2"/>
+          </a:solidFill>
+          <a:ln>
+            <a:noFill/>
+          </a:ln>
+        </p:spPr>
+        <p:style>
+          <a:lnRef idx="1">
+            <a:schemeClr val="accent1"/>
+          </a:lnRef>
+          <a:fillRef idx="3">
+            <a:schemeClr val="accent1"/>
+          </a:fillRef>
+          <a:effectRef idx="2">
+            <a:schemeClr val="accent1"/>
+          </a:effectRef>
+          <a:fontRef idx="minor">
+            <a:schemeClr val="lt1"/>
+          </a:fontRef>
+        </p:style>
+        <p:txBody>
+          <a:bodyPr rtlCol="0" anchor="ctr"/>
+          <a:lstStyle/>
+          <a:p>
+            <a:pPr algn="ctr"/>
+          </a:p>
+        </p:txBody>
+      </p:sp>
+      <p:sp>
+        <p:nvSpPr>
+          <p:cNvPr id="5" name="TextBox 4"/>
+          <p:cNvSpPr txBox="1"/>
+          <p:nvPr/>
+        </p:nvSpPr>
+        <p:spPr>
+          <a:xfrm>
+            <a:off x="840000" y="1750000"/>
+            <a:ext cx="4906000" cy="600000"/>
+          </a:xfrm>
+          <a:prstGeom prst="rect">
+            <a:avLst/>
+          </a:prstGeom>
+          <a:noFill/>
+        </p:spPr>
+        <p:txBody>
+          <a:bodyPr wrap="square">
+            <a:spAutoFit/>
+          </a:bodyPr>
+          <a:lstStyle/>
+          <a:p>
+            <a:pPr>
+              <a:spcAft>
+                <a:spcPts val="1260"/>
+              </a:spcAft>
+            </a:pPr>
+            <a:r>
+              <a:rPr sz="2800" b="1">
+                <a:solidFill>
+                  <a:srgbClr val="C2531C"/>
+                </a:solidFill>
+                <a:latin typeface="Nunito Sans"/>
+              </a:rPr>
+              <a:t>Generalizar deprisa</a:t>
+            </a:r>
+          </a:p>
+        </p:txBody>
+      </p:sp>
+      <p:sp>
+        <p:nvSpPr>
+          <p:cNvPr id="6" name="TextBox 5"/>
+          <p:cNvSpPr txBox="1"/>
+          <p:nvPr/>
+        </p:nvSpPr>
+        <p:spPr>
+          <a:xfrm>
+            <a:off x="840000" y="2400000"/>
+            <a:ext cx="4906000" cy="3500000"/>
+          </a:xfrm>
+          <a:prstGeom prst="rect">
+            <a:avLst/>
+          </a:prstGeom>
+          <a:noFill/>
+        </p:spPr>
+        <p:txBody>
+          <a:bodyPr wrap="square">
+            <a:spAutoFit/>
+          </a:bodyPr>
+          <a:lstStyle/>
+          <a:p>
+            <a:pPr>
+              <a:spcAft>
+                <a:spcPts val="1170"/>
+              </a:spcAft>
+            </a:pPr>
+            <a:r>
+              <a:rPr sz="2600" b="1">
+                <a:solidFill>
+                  <a:srgbClr val="E8793A"/>
+                </a:solidFill>
+                <a:latin typeface="Nunito Sans"/>
+              </a:rPr>
+              <a:t>• </a:t>
+            </a:r>
+            <a:r>
+              <a:rPr sz="2600" b="0">
+                <a:solidFill>
+                  <a:srgbClr val="1F2A44"/>
+                </a:solidFill>
+                <a:latin typeface="Nunito Sans"/>
+              </a:rPr>
+              <a:t>«Mi familia es la normal»</a:t>
+            </a:r>
+          </a:p>
+          <a:p>
+            <a:pPr>
+              <a:spcAft>
+                <a:spcPts val="1170"/>
+              </a:spcAft>
+            </a:pPr>
+            <a:r>
+              <a:rPr sz="2600" b="1">
+                <a:solidFill>
+                  <a:srgbClr val="E8793A"/>
+                </a:solidFill>
+                <a:latin typeface="Nunito Sans"/>
+              </a:rPr>
+              <a:t>• </a:t>
+            </a:r>
+            <a:r>
+              <a:rPr sz="2600" b="0">
+                <a:solidFill>
+                  <a:srgbClr val="1F2A44"/>
+                </a:solidFill>
+                <a:latin typeface="Nunito Sans"/>
+              </a:rPr>
+              <a:t>«En todas las casas se hace como en la mía»</a:t>
+            </a:r>
+          </a:p>
+          <a:p>
+            <a:pPr>
+              <a:spcAft>
+                <a:spcPts val="1170"/>
+              </a:spcAft>
+            </a:pPr>
+            <a:r>
+              <a:rPr sz="2600" b="1">
+                <a:solidFill>
+                  <a:srgbClr val="E8793A"/>
+                </a:solidFill>
+                <a:latin typeface="Nunito Sans"/>
+              </a:rPr>
+              <a:t>• </a:t>
+            </a:r>
+            <a:r>
+              <a:rPr sz="2600" b="0">
+                <a:solidFill>
+                  <a:srgbClr val="1F2A44"/>
+                </a:solidFill>
+                <a:latin typeface="Nunito Sans"/>
+              </a:rPr>
+              <a:t>«Las otras familias son raras»</a:t>
+            </a:r>
+          </a:p>
+        </p:txBody>
+      </p:sp>
+      <p:sp>
+        <p:nvSpPr>
+          <p:cNvPr id="7" name="Rectangle 6"/>
+          <p:cNvSpPr/>
+          <p:nvPr/>
+        </p:nvSpPr>
+        <p:spPr>
+          <a:xfrm>
+            <a:off x="6246000" y="1650000"/>
+            <a:ext cx="5306000" cy="4400000"/>
+          </a:xfrm>
+          <a:prstGeom prst="rect">
+            <a:avLst/>
+          </a:prstGeom>
+          <a:solidFill>
+            <a:srgbClr val="EAF0F7"/>
+          </a:solidFill>
+          <a:ln>
+            <a:noFill/>
+          </a:ln>
+        </p:spPr>
+        <p:style>
+          <a:lnRef idx="1">
+            <a:schemeClr val="accent1"/>
+          </a:lnRef>
+          <a:fillRef idx="3">
+            <a:schemeClr val="accent1"/>
+          </a:fillRef>
+          <a:effectRef idx="2">
+            <a:schemeClr val="accent1"/>
+          </a:effectRef>
+          <a:fontRef idx="minor">
+            <a:schemeClr val="lt1"/>
+          </a:fontRef>
+        </p:style>
+        <p:txBody>
+          <a:bodyPr rtlCol="0" anchor="ctr"/>
+          <a:lstStyle/>
+          <a:p>
+            <a:pPr algn="ctr"/>
+          </a:p>
+        </p:txBody>
+      </p:sp>
+      <p:sp>
+        <p:nvSpPr>
+          <p:cNvPr id="8" name="TextBox 7"/>
+          <p:cNvSpPr txBox="1"/>
+          <p:nvPr/>
+        </p:nvSpPr>
+        <p:spPr>
+          <a:xfrm>
+            <a:off x="6446000" y="1750000"/>
+            <a:ext cx="4906000" cy="600000"/>
+          </a:xfrm>
+          <a:prstGeom prst="rect">
+            <a:avLst/>
+          </a:prstGeom>
+          <a:noFill/>
+        </p:spPr>
+        <p:txBody>
+          <a:bodyPr wrap="square">
+            <a:spAutoFit/>
+          </a:bodyPr>
+          <a:lstStyle/>
+          <a:p>
+            <a:pPr>
+              <a:spcAft>
+                <a:spcPts val="1260"/>
+              </a:spcAft>
+            </a:pPr>
+            <a:r>
+              <a:rPr sz="2800" b="1">
+                <a:solidFill>
+                  <a:srgbClr val="2F6FB5"/>
+                </a:solidFill>
+                <a:latin typeface="Nunito Sans"/>
+              </a:rPr>
+              <a:t>Pensar mejor</a:t>
+            </a:r>
+          </a:p>
+        </p:txBody>
+      </p:sp>
+      <p:sp>
+        <p:nvSpPr>
+          <p:cNvPr id="9" name="TextBox 8"/>
+          <p:cNvSpPr txBox="1"/>
+          <p:nvPr/>
+        </p:nvSpPr>
+        <p:spPr>
+          <a:xfrm>
+            <a:off x="6446000" y="2400000"/>
+            <a:ext cx="4906000" cy="3500000"/>
+          </a:xfrm>
+          <a:prstGeom prst="rect">
+            <a:avLst/>
+          </a:prstGeom>
+          <a:noFill/>
+        </p:spPr>
+        <p:txBody>
+          <a:bodyPr wrap="square">
+            <a:spAutoFit/>
+          </a:bodyPr>
+          <a:lstStyle/>
+          <a:p>
+            <a:pPr>
+              <a:spcAft>
+                <a:spcPts val="1170"/>
+              </a:spcAft>
+            </a:pPr>
+            <a:r>
+              <a:rPr sz="2600" b="1">
+                <a:solidFill>
+                  <a:srgbClr val="E8793A"/>
+                </a:solidFill>
+                <a:latin typeface="Nunito Sans"/>
+              </a:rPr>
+              <a:t>• </a:t>
+            </a:r>
+            <a:r>
+              <a:rPr sz="2600" b="0">
+                <a:solidFill>
+                  <a:srgbClr val="1F2A44"/>
+                </a:solidFill>
+                <a:latin typeface="Nunito Sans"/>
+              </a:rPr>
+              <a:t>Mi familia es </a:t>
+            </a:r>
+            <a:r>
+              <a:rPr sz="2600" b="1">
+                <a:solidFill>
+                  <a:srgbClr val="1F2A44"/>
+                </a:solidFill>
+                <a:latin typeface="Nunito Sans"/>
+              </a:rPr>
+              <a:t>una</a:t>
+            </a:r>
+            <a:r>
+              <a:rPr sz="2600" b="0">
+                <a:solidFill>
+                  <a:srgbClr val="1F2A44"/>
+                </a:solidFill>
+                <a:latin typeface="Nunito Sans"/>
+              </a:rPr>
+              <a:t> de muchas</a:t>
+            </a:r>
+          </a:p>
+          <a:p>
+            <a:pPr>
+              <a:spcAft>
+                <a:spcPts val="1170"/>
+              </a:spcAft>
+            </a:pPr>
+            <a:r>
+              <a:rPr sz="2600" b="1">
+                <a:solidFill>
+                  <a:srgbClr val="E8793A"/>
+                </a:solidFill>
+                <a:latin typeface="Nunito Sans"/>
+              </a:rPr>
+              <a:t>• </a:t>
+            </a:r>
+            <a:r>
+              <a:rPr sz="2600" b="0">
+                <a:solidFill>
+                  <a:srgbClr val="1F2A44"/>
+                </a:solidFill>
+                <a:latin typeface="Nunito Sans"/>
+              </a:rPr>
+              <a:t>¿Cuántos casos he mirado? (sesión 25)</a:t>
+            </a:r>
+          </a:p>
+          <a:p>
+            <a:pPr>
+              <a:spcAft>
+                <a:spcPts val="1170"/>
+              </a:spcAft>
+            </a:pPr>
+            <a:r>
+              <a:rPr sz="2600" b="1">
+                <a:solidFill>
+                  <a:srgbClr val="E8793A"/>
+                </a:solidFill>
+                <a:latin typeface="Nunito Sans"/>
+              </a:rPr>
+              <a:t>• </a:t>
+            </a:r>
+            <a:r>
+              <a:rPr sz="2600" b="0">
+                <a:solidFill>
+                  <a:srgbClr val="1F2A44"/>
+                </a:solidFill>
+                <a:latin typeface="Nunito Sans"/>
+              </a:rPr>
+              <a:t>Lo común: cuidado y vínculo</a:t>
+            </a:r>
+          </a:p>
+        </p:txBody>
+      </p:sp>
+    </p:spTree>
+  </p:cSld>
+  <p:clrMapOvr>
+    <a:masterClrMapping/>
+  </p:clrMapOvr>
+</p:sld>
+</file>
+
+<file path=ppt/slides/slide13.xml><?xml version="1.0" encoding="utf-8"?>
 <p:sld xmlns:a="http://schemas.openxmlformats.org/drawingml/2006/main" xmlns:p="http://schemas.openxmlformats.org/presentationml/2006/main" xmlns:r="http://schemas.openxmlformats.org/officeDocument/2006/relationships">
   <p:cSld>
     <p:bg>
@@ -4336,7 +4853,7 @@
                 </a:solidFill>
                 <a:latin typeface="Fredoka"/>
               </a:rPr>
-              <a:t>⚠ «Solo era una broma»</a:t>
+              <a:t>⚠ ¿Normal es lo más frecuente?</a:t>
             </a:r>
           </a:p>
         </p:txBody>
@@ -4418,7 +4935,7 @@
                 </a:solidFill>
                 <a:latin typeface="Nunito Sans"/>
               </a:rPr>
-              <a:t>Un chico graba a otro fallando un tiro en el partido, le pone música graciosa y lo sube. Muchos se ríen. El primero dice: «Solo era una broma».</a:t>
+              <a:t>En la clase de un chico, la mayoría vive con su padre y su madre. Ese chico concluye: «Esa es la familia normal, y las demás no». (Ejemplo inventado.)</a:t>
             </a:r>
           </a:p>
         </p:txBody>
@@ -4466,7 +4983,7 @@
                 </a:solidFill>
                 <a:latin typeface="Nunito Sans"/>
               </a:rPr>
-              <a:t>Si lo hizo de broma, ¿no pasa nada?</a:t>
+              <a:t>Si es la más frecuente, ¿es la normal?</a:t>
             </a:r>
           </a:p>
           <a:p>
@@ -4491,7 +5008,7 @@
                 </a:solidFill>
                 <a:latin typeface="Nunito Sans"/>
               </a:rPr>
-              <a:t>Parece que no: no quería hacer daño y la gente se ríe.</a:t>
+              <a:t>Parece que sí: lo que más se ve es lo «normal».</a:t>
             </a:r>
           </a:p>
           <a:p>
@@ -4516,7 +5033,43 @@
                 </a:solidFill>
                 <a:latin typeface="Nunito Sans"/>
               </a:rPr>
-              <a:t>Pero ¿se ríe el otro? ¿Dio permiso? Su imagen es suya.</a:t>
+              <a:t>Pero «normal» tiene dos sentidos: </a:t>
+            </a:r>
+            <a:r>
+              <a:rPr sz="2400" b="1">
+                <a:solidFill>
+                  <a:srgbClr val="1F2A44"/>
+                </a:solidFill>
+                <a:latin typeface="Nunito Sans"/>
+              </a:rPr>
+              <a:t>frecuente</a:t>
+            </a:r>
+            <a:r>
+              <a:rPr sz="2400" b="0">
+                <a:solidFill>
+                  <a:srgbClr val="1F2A44"/>
+                </a:solidFill>
+                <a:latin typeface="Nunito Sans"/>
+              </a:rPr>
+              <a:t> (lo que más hay) y </a:t>
+            </a:r>
+            <a:r>
+              <a:rPr sz="2400" b="1">
+                <a:solidFill>
+                  <a:srgbClr val="1F2A44"/>
+                </a:solidFill>
+                <a:latin typeface="Nunito Sans"/>
+              </a:rPr>
+              <a:t>correcto</a:t>
+            </a:r>
+            <a:r>
+              <a:rPr sz="2400" b="0">
+                <a:solidFill>
+                  <a:srgbClr val="1F2A44"/>
+                </a:solidFill>
+                <a:latin typeface="Nunito Sans"/>
+              </a:rPr>
+              <a:t> (como debe ser).</a:t>
             </a:r>
           </a:p>
           <a:p>
@@ -4541,7 +5094,7 @@
                 </a:solidFill>
                 <a:latin typeface="Nunito Sans"/>
               </a:rPr>
-              <a:t>Una broma lo es si se ríen todos, también quien sale. Si no, es reírse de alguien.</a:t>
+              <a:t>Que algo sea frecuente no dice que sea mejor. Ese chico salta de un sentido a otro sin darse cuenta.</a:t>
             </a:r>
           </a:p>
           <a:p>
@@ -4566,111 +5119,7 @@
                 </a:solidFill>
                 <a:latin typeface="Nunito Sans"/>
               </a:rPr>
-              <a:t>Conclusión: la intención no borra el daño. Sin permiso, subir el vídeo no respeta al otro.</a:t>
-            </a:r>
-          </a:p>
-        </p:txBody>
-      </p:sp>
-    </p:spTree>
-  </p:cSld>
-  <p:clrMapOvr>
-    <a:masterClrMapping/>
-  </p:clrMapOvr>
-</p:sld>
-</file>
-
-<file path=ppt/slides/slide13.xml><?xml version="1.0" encoding="utf-8"?>
-<p:sld xmlns:a="http://schemas.openxmlformats.org/drawingml/2006/main" xmlns:p="http://schemas.openxmlformats.org/presentationml/2006/main" xmlns:r="http://schemas.openxmlformats.org/officeDocument/2006/relationships">
-  <p:cSld>
-    <p:bg>
-      <p:bgPr>
-        <a:solidFill>
-          <a:srgbClr val="1F2A44"/>
-        </a:solidFill>
-        <a:effectLst/>
-      </p:bgPr>
-    </p:bg>
-    <p:spTree>
-      <p:nvGrpSpPr>
-        <p:cNvPr id="1" name=""/>
-        <p:cNvGrpSpPr/>
-        <p:nvPr/>
-      </p:nvGrpSpPr>
-      <p:grpSpPr/>
-      <p:sp>
-        <p:nvSpPr>
-          <p:cNvPr id="2" name="TextBox 1"/>
-          <p:cNvSpPr txBox="1"/>
-          <p:nvPr/>
-        </p:nvSpPr>
-        <p:spPr>
-          <a:xfrm>
-            <a:off x="640000" y="2300000"/>
-            <a:ext cx="10912000" cy="500000"/>
-          </a:xfrm>
-          <a:prstGeom prst="rect">
-            <a:avLst/>
-          </a:prstGeom>
-          <a:noFill/>
-        </p:spPr>
-        <p:txBody>
-          <a:bodyPr wrap="square">
-            <a:spAutoFit/>
-          </a:bodyPr>
-          <a:lstStyle/>
-          <a:p>
-            <a:pPr>
-              <a:spcAft>
-                <a:spcPts val="810"/>
-              </a:spcAft>
-            </a:pPr>
-            <a:r>
-              <a:rPr sz="1800" b="1">
-                <a:solidFill>
-                  <a:srgbClr val="F4B183"/>
-                </a:solidFill>
-                <a:latin typeface="Nunito Sans"/>
-              </a:rPr>
-              <a:t>BLOQUE 3</a:t>
-            </a:r>
-          </a:p>
-        </p:txBody>
-      </p:sp>
-      <p:sp>
-        <p:nvSpPr>
-          <p:cNvPr id="3" name="TextBox 2"/>
-          <p:cNvSpPr txBox="1"/>
-          <p:nvPr/>
-        </p:nvSpPr>
-        <p:spPr>
-          <a:xfrm>
-            <a:off x="640000" y="2800000"/>
-            <a:ext cx="10912000" cy="800000"/>
-          </a:xfrm>
-          <a:prstGeom prst="rect">
-            <a:avLst/>
-          </a:prstGeom>
-          <a:noFill/>
-        </p:spPr>
-        <p:txBody>
-          <a:bodyPr wrap="square">
-            <a:spAutoFit/>
-          </a:bodyPr>
-          <a:lstStyle/>
-          <a:p>
-            <a:pPr>
-              <a:spcAft>
-                <a:spcPts val="2160"/>
-              </a:spcAft>
-            </a:pPr>
-            <a:r>
-              <a:rPr sz="4800" b="1">
-                <a:solidFill>
-                  <a:srgbClr val="FBF7EF"/>
-                </a:solidFill>
-                <a:latin typeface="Fredoka"/>
-              </a:rPr>
-              <a:t>Si te pasa o lo ves</a:t>
+              <a:t>Conclusión: una familia puede ser menos frecuente e igual de familia. Ojo con las palabras de dos sentidos.</a:t>
             </a:r>
           </a:p>
         </p:txBody>
@@ -4735,7 +5184,7 @@
                 </a:solidFill>
                 <a:latin typeface="Nunito Sans"/>
               </a:rPr>
-              <a:t>BLOQUE 3 · SI TE PASA O LO VES</a:t>
+              <a:t>LO DE HOY EN TRES LÍNEAS</a:t>
             </a:r>
           </a:p>
         </p:txBody>
@@ -4774,7 +5223,7 @@
                 </a:solidFill>
                 <a:latin typeface="Fredoka"/>
               </a:rPr>
-              <a:t>Qué hacer ante un conflicto en las redes</a:t>
+              <a:t>Escríbelo tú primero, sin mirar</a:t>
             </a:r>
           </a:p>
         </p:txBody>
@@ -4787,8 +5236,8 @@
         </p:nvSpPr>
         <p:spPr>
           <a:xfrm>
-            <a:off x="640000" y="1650000"/>
-            <a:ext cx="10912000" cy="4808000"/>
+            <a:off x="640000" y="1800000"/>
+            <a:ext cx="10912000" cy="1500000"/>
           </a:xfrm>
           <a:prstGeom prst="rect">
             <a:avLst/>
@@ -4803,155 +5252,17 @@
           <a:p>
             <a:pPr>
               <a:spcAft>
-                <a:spcPts val="1260"/>
-              </a:spcAft>
-            </a:pPr>
-            <a:r>
-              <a:rPr sz="2800" b="1">
-                <a:solidFill>
-                  <a:srgbClr val="E8793A"/>
-                </a:solidFill>
-                <a:latin typeface="Nunito Sans"/>
-              </a:rPr>
-              <a:t>• </a:t>
-            </a:r>
-            <a:r>
-              <a:rPr sz="2800" b="1">
-                <a:solidFill>
-                  <a:srgbClr val="1F2A44"/>
-                </a:solidFill>
-                <a:latin typeface="Nunito Sans"/>
-              </a:rPr>
-              <a:t>No contestar en caliente:</a:t>
-            </a:r>
-            <a:r>
-              <a:rPr sz="2800" b="0">
-                <a:solidFill>
-                  <a:srgbClr val="1F2A44"/>
-                </a:solidFill>
-                <a:latin typeface="Nunito Sans"/>
-              </a:rPr>
-              <a:t> nombrar, esperar y preguntar.</a:t>
-            </a:r>
-          </a:p>
-          <a:p>
-            <a:pPr>
-              <a:spcAft>
-                <a:spcPts val="1260"/>
-              </a:spcAft>
-            </a:pPr>
-            <a:r>
-              <a:rPr sz="2800" b="1">
-                <a:solidFill>
-                  <a:srgbClr val="E8793A"/>
-                </a:solidFill>
-                <a:latin typeface="Nunito Sans"/>
-              </a:rPr>
-              <a:t>• </a:t>
-            </a:r>
-            <a:r>
-              <a:rPr sz="2800" b="1">
-                <a:solidFill>
-                  <a:srgbClr val="1F2A44"/>
-                </a:solidFill>
-                <a:latin typeface="Nunito Sans"/>
-              </a:rPr>
-              <a:t>No reenviar:</a:t>
-            </a:r>
-            <a:r>
-              <a:rPr sz="2800" b="0">
-                <a:solidFill>
-                  <a:srgbClr val="1F2A44"/>
-                </a:solidFill>
-                <a:latin typeface="Nunito Sans"/>
-              </a:rPr>
-              <a:t> si no lo difundes, dejas de hacerlo crecer.</a:t>
-            </a:r>
-          </a:p>
-          <a:p>
-            <a:pPr>
-              <a:spcAft>
-                <a:spcPts val="1260"/>
-              </a:spcAft>
-            </a:pPr>
-            <a:r>
-              <a:rPr sz="2800" b="1">
-                <a:solidFill>
-                  <a:srgbClr val="E8793A"/>
-                </a:solidFill>
-                <a:latin typeface="Nunito Sans"/>
-              </a:rPr>
-              <a:t>• </a:t>
-            </a:r>
-            <a:r>
-              <a:rPr sz="2800" b="1">
-                <a:solidFill>
-                  <a:srgbClr val="1F2A44"/>
-                </a:solidFill>
-                <a:latin typeface="Nunito Sans"/>
-              </a:rPr>
-              <a:t>Guardar pruebas,</a:t>
-            </a:r>
-            <a:r>
-              <a:rPr sz="2800" b="0">
-                <a:solidFill>
-                  <a:srgbClr val="1F2A44"/>
-                </a:solidFill>
-                <a:latin typeface="Nunito Sans"/>
-              </a:rPr>
-              <a:t> bloquear y denunciar en la propia aplicación.</a:t>
-            </a:r>
-          </a:p>
-          <a:p>
-            <a:pPr>
-              <a:spcAft>
-                <a:spcPts val="1260"/>
-              </a:spcAft>
-            </a:pPr>
-            <a:r>
-              <a:rPr sz="2800" b="1">
-                <a:solidFill>
-                  <a:srgbClr val="E8793A"/>
-                </a:solidFill>
-                <a:latin typeface="Nunito Sans"/>
-              </a:rPr>
-              <a:t>• </a:t>
-            </a:r>
-            <a:r>
-              <a:rPr sz="2800" b="1">
-                <a:solidFill>
-                  <a:srgbClr val="1F2A44"/>
-                </a:solidFill>
-                <a:latin typeface="Nunito Sans"/>
-              </a:rPr>
-              <a:t>Contarlo</a:t>
-            </a:r>
-            <a:r>
-              <a:rPr sz="2800" b="0">
-                <a:solidFill>
-                  <a:srgbClr val="1F2A44"/>
-                </a:solidFill>
-                <a:latin typeface="Nunito Sans"/>
-              </a:rPr>
-              <a:t> a un adulto de confianza. También existe el teléfono </a:t>
-            </a:r>
-            <a:r>
-              <a:rPr sz="2800" b="1">
-                <a:solidFill>
-                  <a:srgbClr val="1F2A44"/>
-                </a:solidFill>
-                <a:latin typeface="Nunito Sans"/>
-              </a:rPr>
-              <a:t>017</a:t>
-            </a:r>
-            <a:r>
-              <a:rPr sz="2800" b="0">
-                <a:solidFill>
-                  <a:srgbClr val="1F2A44"/>
-                </a:solidFill>
-                <a:latin typeface="Nunito Sans"/>
-              </a:rPr>
-              <a:t> (INCIBE), gratuito.</a:t>
+                <a:spcPts val="1170"/>
+              </a:spcAft>
+            </a:pPr>
+            <a:r>
+              <a:rPr sz="2600" b="0">
+                <a:solidFill>
+                  <a:srgbClr val="4A5568"/>
+                </a:solidFill>
+                <a:latin typeface="Nunito Sans"/>
+              </a:rPr>
+              <a:t>Dos minutos. Después lo comparamos.</a:t>
             </a:r>
           </a:p>
         </p:txBody>
@@ -5029,8 +5340,8 @@
         </p:nvSpPr>
         <p:spPr>
           <a:xfrm>
-            <a:off x="640000" y="760000"/>
-            <a:ext cx="10912000" cy="800000"/>
+            <a:off x="640000" y="1300000"/>
+            <a:ext cx="10912000" cy="4800000"/>
           </a:xfrm>
           <a:prstGeom prst="rect">
             <a:avLst/>
@@ -5045,56 +5356,76 @@
           <a:p>
             <a:pPr>
               <a:spcAft>
-                <a:spcPts val="1710"/>
-              </a:spcAft>
-            </a:pPr>
-            <a:r>
-              <a:rPr sz="3800" b="1">
-                <a:solidFill>
-                  <a:srgbClr val="1F2A44"/>
-                </a:solidFill>
-                <a:latin typeface="Fredoka"/>
-              </a:rPr>
-              <a:t>Escríbelo tú primero, sin mirar</a:t>
-            </a:r>
-          </a:p>
-        </p:txBody>
-      </p:sp>
-      <p:sp>
-        <p:nvSpPr>
-          <p:cNvPr id="4" name="TextBox 3"/>
-          <p:cNvSpPr txBox="1"/>
-          <p:nvPr/>
-        </p:nvSpPr>
-        <p:spPr>
-          <a:xfrm>
-            <a:off x="640000" y="1800000"/>
-            <a:ext cx="10912000" cy="1500000"/>
-          </a:xfrm>
-          <a:prstGeom prst="rect">
-            <a:avLst/>
-          </a:prstGeom>
-          <a:noFill/>
-        </p:spPr>
-        <p:txBody>
-          <a:bodyPr wrap="square">
-            <a:spAutoFit/>
-          </a:bodyPr>
-          <a:lstStyle/>
-          <a:p>
-            <a:pPr>
-              <a:spcAft>
-                <a:spcPts val="1170"/>
-              </a:spcAft>
-            </a:pPr>
-            <a:r>
-              <a:rPr sz="2600" b="0">
-                <a:solidFill>
-                  <a:srgbClr val="4A5568"/>
-                </a:solidFill>
-                <a:latin typeface="Nunito Sans"/>
-              </a:rPr>
-              <a:t>Dos minutos. Después lo comparamos.</a:t>
+                <a:spcPts val="1350"/>
+              </a:spcAft>
+            </a:pPr>
+            <a:r>
+              <a:rPr sz="3000" b="1">
+                <a:solidFill>
+                  <a:srgbClr val="E8793A"/>
+                </a:solidFill>
+                <a:latin typeface="Nunito Sans"/>
+              </a:rPr>
+              <a:t>1. </a:t>
+            </a:r>
+            <a:r>
+              <a:rPr sz="3000" b="0">
+                <a:solidFill>
+                  <a:srgbClr val="1F2A44"/>
+                </a:solidFill>
+                <a:latin typeface="Nunito Sans"/>
+              </a:rPr>
+              <a:t>Hay muchos modelos de familia: nuclear, monoparental, reconstituida, homoparental, extensa, de acogida…</a:t>
+            </a:r>
+          </a:p>
+          <a:p>
+            <a:pPr>
+              <a:spcAft>
+                <a:spcPts val="1350"/>
+              </a:spcAft>
+            </a:pPr>
+            <a:r>
+              <a:rPr sz="3000" b="1">
+                <a:solidFill>
+                  <a:srgbClr val="E8793A"/>
+                </a:solidFill>
+                <a:latin typeface="Nunito Sans"/>
+              </a:rPr>
+              <a:t>2. </a:t>
+            </a:r>
+            <a:r>
+              <a:rPr sz="3000" b="0">
+                <a:solidFill>
+                  <a:srgbClr val="1F2A44"/>
+                </a:solidFill>
+                <a:latin typeface="Nunito Sans"/>
+              </a:rPr>
+              <a:t>Lo que tienen en común es el cuidado y un vínculo que dura.</a:t>
+            </a:r>
+          </a:p>
+          <a:p>
+            <a:pPr>
+              <a:spcAft>
+                <a:spcPts val="1350"/>
+              </a:spcAft>
+            </a:pPr>
+            <a:r>
+              <a:rPr sz="3000" b="1">
+                <a:solidFill>
+                  <a:srgbClr val="E8793A"/>
+                </a:solidFill>
+                <a:latin typeface="Nunito Sans"/>
+              </a:rPr>
+              <a:t>3. </a:t>
+            </a:r>
+            <a:r>
+              <a:rPr sz="3000" b="0">
+                <a:solidFill>
+                  <a:srgbClr val="1F2A44"/>
+                </a:solidFill>
+                <a:latin typeface="Nunito Sans"/>
+              </a:rPr>
+              <a:t>Tomar mi familia como «la normal» es una generalización apresurada.</a:t>
             </a:r>
           </a:p>
         </p:txBody>
@@ -5113,7 +5444,7 @@
     <p:bg>
       <p:bgPr>
         <a:solidFill>
-          <a:srgbClr val="FBF7EF"/>
+          <a:srgbClr val="1F2A44"/>
         </a:solidFill>
         <a:effectLst/>
       </p:bgPr>
@@ -5155,11 +5486,11 @@
             <a:r>
               <a:rPr sz="1400" b="1">
                 <a:solidFill>
-                  <a:srgbClr val="E8793A"/>
-                </a:solidFill>
-                <a:latin typeface="Nunito Sans"/>
-              </a:rPr>
-              <a:t>LO DE HOY EN TRES LÍNEAS</a:t>
+                  <a:srgbClr val="F4B183"/>
+                </a:solidFill>
+                <a:latin typeface="Nunito Sans"/>
+              </a:rPr>
+              <a:t>VÍDEO</a:t>
             </a:r>
           </a:p>
         </p:txBody>
@@ -5172,8 +5503,8 @@
         </p:nvSpPr>
         <p:spPr>
           <a:xfrm>
-            <a:off x="640000" y="1300000"/>
-            <a:ext cx="10912000" cy="4800000"/>
+            <a:off x="640000" y="760000"/>
+            <a:ext cx="10912000" cy="800000"/>
           </a:xfrm>
           <a:prstGeom prst="rect">
             <a:avLst/>
@@ -5188,76 +5519,56 @@
           <a:p>
             <a:pPr>
               <a:spcAft>
-                <a:spcPts val="1350"/>
-              </a:spcAft>
-            </a:pPr>
-            <a:r>
-              <a:rPr sz="3000" b="1">
-                <a:solidFill>
-                  <a:srgbClr val="E8793A"/>
-                </a:solidFill>
-                <a:latin typeface="Nunito Sans"/>
-              </a:rPr>
-              <a:t>1. </a:t>
-            </a:r>
-            <a:r>
-              <a:rPr sz="3000" b="0">
-                <a:solidFill>
-                  <a:srgbClr val="1F2A44"/>
-                </a:solidFill>
-                <a:latin typeface="Nunito Sans"/>
-              </a:rPr>
-              <a:t>En las redes los conflictos crecen: sin cara, anonimato, todo queda guardado y lo ve mucha gente.</a:t>
-            </a:r>
-          </a:p>
-          <a:p>
-            <a:pPr>
-              <a:spcAft>
-                <a:spcPts val="1350"/>
-              </a:spcAft>
-            </a:pPr>
-            <a:r>
-              <a:rPr sz="3000" b="1">
-                <a:solidFill>
-                  <a:srgbClr val="E8793A"/>
-                </a:solidFill>
-                <a:latin typeface="Nunito Sans"/>
-              </a:rPr>
-              <a:t>2. </a:t>
-            </a:r>
-            <a:r>
-              <a:rPr sz="3000" b="0">
-                <a:solidFill>
-                  <a:srgbClr val="1F2A44"/>
-                </a:solidFill>
-                <a:latin typeface="Nunito Sans"/>
-              </a:rPr>
-              <a:t>El ciberacoso es hacer daño a propósito y de forma repetida con la tecnología.</a:t>
-            </a:r>
-          </a:p>
-          <a:p>
-            <a:pPr>
-              <a:spcAft>
-                <a:spcPts val="1350"/>
-              </a:spcAft>
-            </a:pPr>
-            <a:r>
-              <a:rPr sz="3000" b="1">
-                <a:solidFill>
-                  <a:srgbClr val="E8793A"/>
-                </a:solidFill>
-                <a:latin typeface="Nunito Sans"/>
-              </a:rPr>
-              <a:t>3. </a:t>
-            </a:r>
-            <a:r>
-              <a:rPr sz="3000" b="0">
-                <a:solidFill>
-                  <a:srgbClr val="1F2A44"/>
-                </a:solidFill>
-                <a:latin typeface="Nunito Sans"/>
-              </a:rPr>
-              <a:t>Tu imagen y tus mensajes privados son tuyos; los de los demás, también.</a:t>
+                <a:spcPts val="1620"/>
+              </a:spcAft>
+            </a:pPr>
+            <a:r>
+              <a:rPr sz="3600" b="1">
+                <a:solidFill>
+                  <a:srgbClr val="FBF7EF"/>
+                </a:solidFill>
+                <a:latin typeface="Fredoka"/>
+              </a:rPr>
+              <a:t>La diversidad familiar: distintos modelos de familia</a:t>
+            </a:r>
+          </a:p>
+        </p:txBody>
+      </p:sp>
+      <p:sp>
+        <p:nvSpPr>
+          <p:cNvPr id="4" name="TextBox 3"/>
+          <p:cNvSpPr txBox="1"/>
+          <p:nvPr/>
+        </p:nvSpPr>
+        <p:spPr>
+          <a:xfrm>
+            <a:off x="640000" y="2200000"/>
+            <a:ext cx="10912000" cy="2000000"/>
+          </a:xfrm>
+          <a:prstGeom prst="rect">
+            <a:avLst/>
+          </a:prstGeom>
+          <a:noFill/>
+        </p:spPr>
+        <p:txBody>
+          <a:bodyPr wrap="square">
+            <a:spAutoFit/>
+          </a:bodyPr>
+          <a:lstStyle/>
+          <a:p>
+            <a:pPr>
+              <a:spcAft>
+                <a:spcPts val="1080"/>
+              </a:spcAft>
+            </a:pPr>
+            <a:r>
+              <a:rPr sz="2400" b="0">
+                <a:solidFill>
+                  <a:srgbClr val="C9D3E6"/>
+                </a:solidFill>
+                <a:latin typeface="Nunito Sans"/>
+              </a:rPr>
+              <a:t>Ver más modelos de familia y lo que tienen en común.</a:t>
             </a:r>
           </a:p>
         </p:txBody>
@@ -5322,149 +5633,6 @@
                 </a:solidFill>
                 <a:latin typeface="Nunito Sans"/>
               </a:rPr>
-              <a:t>VÍDEO</a:t>
-            </a:r>
-          </a:p>
-        </p:txBody>
-      </p:sp>
-      <p:sp>
-        <p:nvSpPr>
-          <p:cNvPr id="3" name="TextBox 2"/>
-          <p:cNvSpPr txBox="1"/>
-          <p:nvPr/>
-        </p:nvSpPr>
-        <p:spPr>
-          <a:xfrm>
-            <a:off x="640000" y="760000"/>
-            <a:ext cx="10912000" cy="800000"/>
-          </a:xfrm>
-          <a:prstGeom prst="rect">
-            <a:avLst/>
-          </a:prstGeom>
-          <a:noFill/>
-        </p:spPr>
-        <p:txBody>
-          <a:bodyPr wrap="square">
-            <a:spAutoFit/>
-          </a:bodyPr>
-          <a:lstStyle/>
-          <a:p>
-            <a:pPr>
-              <a:spcAft>
-                <a:spcPts val="1620"/>
-              </a:spcAft>
-            </a:pPr>
-            <a:r>
-              <a:rPr sz="3600" b="1">
-                <a:solidFill>
-                  <a:srgbClr val="FBF7EF"/>
-                </a:solidFill>
-                <a:latin typeface="Fredoka"/>
-              </a:rPr>
-              <a:t>Qué es el ciberacoso y qué hacer si lo sufres o lo ves</a:t>
-            </a:r>
-          </a:p>
-        </p:txBody>
-      </p:sp>
-      <p:sp>
-        <p:nvSpPr>
-          <p:cNvPr id="4" name="TextBox 3"/>
-          <p:cNvSpPr txBox="1"/>
-          <p:nvPr/>
-        </p:nvSpPr>
-        <p:spPr>
-          <a:xfrm>
-            <a:off x="640000" y="2200000"/>
-            <a:ext cx="10912000" cy="2000000"/>
-          </a:xfrm>
-          <a:prstGeom prst="rect">
-            <a:avLst/>
-          </a:prstGeom>
-          <a:noFill/>
-        </p:spPr>
-        <p:txBody>
-          <a:bodyPr wrap="square">
-            <a:spAutoFit/>
-          </a:bodyPr>
-          <a:lstStyle/>
-          <a:p>
-            <a:pPr>
-              <a:spcAft>
-                <a:spcPts val="1080"/>
-              </a:spcAft>
-            </a:pPr>
-            <a:r>
-              <a:rPr sz="2400" b="0">
-                <a:solidFill>
-                  <a:srgbClr val="C9D3E6"/>
-                </a:solidFill>
-                <a:latin typeface="Nunito Sans"/>
-              </a:rPr>
-              <a:t>Que vean casos distintos a los de clase y sepan a quién pedir ayuda.</a:t>
-            </a:r>
-          </a:p>
-        </p:txBody>
-      </p:sp>
-    </p:spTree>
-  </p:cSld>
-  <p:clrMapOvr>
-    <a:masterClrMapping/>
-  </p:clrMapOvr>
-</p:sld>
-</file>
-
-<file path=ppt/slides/slide18.xml><?xml version="1.0" encoding="utf-8"?>
-<p:sld xmlns:a="http://schemas.openxmlformats.org/drawingml/2006/main" xmlns:p="http://schemas.openxmlformats.org/presentationml/2006/main" xmlns:r="http://schemas.openxmlformats.org/officeDocument/2006/relationships">
-  <p:cSld>
-    <p:bg>
-      <p:bgPr>
-        <a:solidFill>
-          <a:srgbClr val="1F2A44"/>
-        </a:solidFill>
-        <a:effectLst/>
-      </p:bgPr>
-    </p:bg>
-    <p:spTree>
-      <p:nvGrpSpPr>
-        <p:cNvPr id="1" name=""/>
-        <p:cNvGrpSpPr/>
-        <p:nvPr/>
-      </p:nvGrpSpPr>
-      <p:grpSpPr/>
-      <p:sp>
-        <p:nvSpPr>
-          <p:cNvPr id="2" name="TextBox 1"/>
-          <p:cNvSpPr txBox="1"/>
-          <p:nvPr/>
-        </p:nvSpPr>
-        <p:spPr>
-          <a:xfrm>
-            <a:off x="640000" y="380000"/>
-            <a:ext cx="10912000" cy="420000"/>
-          </a:xfrm>
-          <a:prstGeom prst="rect">
-            <a:avLst/>
-          </a:prstGeom>
-          <a:noFill/>
-        </p:spPr>
-        <p:txBody>
-          <a:bodyPr wrap="square">
-            <a:spAutoFit/>
-          </a:bodyPr>
-          <a:lstStyle/>
-          <a:p>
-            <a:pPr>
-              <a:spcAft>
-                <a:spcPts val="630"/>
-              </a:spcAft>
-            </a:pPr>
-            <a:r>
-              <a:rPr sz="1400" b="1">
-                <a:solidFill>
-                  <a:srgbClr val="F4B183"/>
-                </a:solidFill>
-                <a:latin typeface="Nunito Sans"/>
-              </a:rPr>
               <a:t>AHORA, LA HOJA DEL DÍA</a:t>
             </a:r>
           </a:p>
@@ -6058,7 +6226,7 @@
                 </a:solidFill>
                 <a:latin typeface="Nunito Sans"/>
               </a:rPr>
-              <a:t>Un ______ es un choque entre personas que quieren cosas que parecen incompatibles.  (sesión 76)</a:t>
+              <a:t>Un ______ del amor romántico es una creencia sobre el amor que se da por verdadera, pero es falsa o exagerada.  (sesión 76)</a:t>
             </a:r>
           </a:p>
           <a:p>
@@ -6083,7 +6251,7 @@
                 </a:solidFill>
                 <a:latin typeface="Nunito Sans"/>
               </a:rPr>
-              <a:t>______ es buscar juntos una salida buena para los dos.  (sesión 76)</a:t>
+              <a:t>Vigilar a la pareja y presentarlo como preocupación es ______ disfrazado de cariño.  (sesión 76)</a:t>
             </a:r>
           </a:p>
           <a:p>
@@ -6269,7 +6437,7 @@
                 </a:solidFill>
                 <a:latin typeface="Nunito Sans"/>
               </a:rPr>
-              <a:t>conflicto</a:t>
+              <a:t>mito</a:t>
             </a:r>
             <a:r>
               <a:rPr sz="2600" b="0">
@@ -6278,7 +6446,7 @@
                 </a:solidFill>
                 <a:latin typeface="Nunito Sans"/>
               </a:rPr>
-              <a:t> es un choque entre personas que quieren cosas que parecen incompatibles.  (sesión 76)</a:t>
+              <a:t> del amor romántico es una creencia sobre el amor que se da por verdadera, pero es falsa o exagerada.  (sesión 76)</a:t>
             </a:r>
           </a:p>
           <a:p>
@@ -6297,13 +6465,22 @@
               <a:t>2. </a:t>
             </a:r>
             <a:r>
+              <a:rPr sz="2600" b="0">
+                <a:solidFill>
+                  <a:srgbClr val="1F2A44"/>
+                </a:solidFill>
+                <a:latin typeface="Nunito Sans"/>
+              </a:rPr>
+              <a:t>Vigilar a la pareja y presentarlo como preocupación es </a:t>
+            </a:r>
+            <a:r>
               <a:rPr sz="2600" b="1">
                 <a:solidFill>
                   <a:srgbClr val="1F2A44"/>
                 </a:solidFill>
                 <a:latin typeface="Nunito Sans"/>
               </a:rPr>
-              <a:t>Colaborar</a:t>
+              <a:t>control</a:t>
             </a:r>
             <a:r>
               <a:rPr sz="2600" b="0">
@@ -6312,7 +6489,7 @@
                 </a:solidFill>
                 <a:latin typeface="Nunito Sans"/>
               </a:rPr>
-              <a:t> es buscar juntos una salida buena para los dos.  (sesión 76)</a:t>
+              <a:t> disfrazado de cariño.  (sesión 76)</a:t>
             </a:r>
           </a:p>
           <a:p>
@@ -6493,7 +6670,7 @@
                 </a:solidFill>
                 <a:latin typeface="Nunito Sans"/>
               </a:rPr>
-              <a:t>Alguien hace una captura de un audio privado de una chica y la sube al chat del equipo de balonmano. En diez minutos la han visto sesenta personas.</a:t>
+              <a:t>Un libro de texto antiguo dibuja «la familia»: un padre, una madre, un niño, una niña y un perro.</a:t>
             </a:r>
           </a:p>
         </p:txBody>
@@ -6532,7 +6709,7 @@
                 </a:solidFill>
                 <a:latin typeface="Nunito Sans"/>
               </a:rPr>
-              <a:t>¿Por qué esto hace más daño que si se lo hubiera dicho a una sola persona?</a:t>
+              <a:t>¿Se parece a todas las familias que conoces? ¿Qué hace que algo sea una familia?</a:t>
             </a:r>
           </a:p>
         </p:txBody>
@@ -6636,7 +6813,7 @@
                 </a:solidFill>
                 <a:latin typeface="Fredoka"/>
               </a:rPr>
-              <a:t>Por qué en las redes se escala más</a:t>
+              <a:t>Modelos de familia</a:t>
             </a:r>
           </a:p>
         </p:txBody>
@@ -6701,7 +6878,7 @@
                 </a:solidFill>
                 <a:latin typeface="Nunito Sans"/>
               </a:rPr>
-              <a:t>BLOQUE 1 · POR QUÉ EN LAS REDES SE ESCALA MÁS</a:t>
+              <a:t>BLOQUE 1 · MODELOS DE FAMILIA</a:t>
             </a:r>
           </a:p>
         </p:txBody>
@@ -6740,14 +6917,57 @@
                 </a:solidFill>
                 <a:latin typeface="Fredoka"/>
               </a:rPr>
-              <a:t>Cuatro razones por las que un conflicto crece en las redes</a:t>
-            </a:r>
-          </a:p>
-        </p:txBody>
-      </p:sp>
-      <p:sp>
-        <p:nvSpPr>
-          <p:cNvPr id="4" name="TextBox 3"/>
+              <a:t>Familia</a:t>
+            </a:r>
+          </a:p>
+        </p:txBody>
+      </p:sp>
+      <p:sp>
+        <p:nvSpPr>
+          <p:cNvPr id="4" name="Rectangle 3"/>
+          <p:cNvSpPr/>
+          <p:nvPr/>
+        </p:nvSpPr>
+        <p:spPr>
+          <a:xfrm>
+            <a:off x="640000" y="1650000"/>
+            <a:ext cx="10912000" cy="1150000"/>
+          </a:xfrm>
+          <a:prstGeom prst="rect">
+            <a:avLst/>
+          </a:prstGeom>
+          <a:solidFill>
+            <a:srgbClr val="EAF0F7"/>
+          </a:solidFill>
+          <a:ln>
+            <a:noFill/>
+          </a:ln>
+        </p:spPr>
+        <p:style>
+          <a:lnRef idx="1">
+            <a:schemeClr val="accent1"/>
+          </a:lnRef>
+          <a:fillRef idx="3">
+            <a:schemeClr val="accent1"/>
+          </a:fillRef>
+          <a:effectRef idx="2">
+            <a:schemeClr val="accent1"/>
+          </a:effectRef>
+          <a:fontRef idx="minor">
+            <a:schemeClr val="lt1"/>
+          </a:fontRef>
+        </p:style>
+        <p:txBody>
+          <a:bodyPr rtlCol="0" anchor="ctr"/>
+          <a:lstStyle/>
+          <a:p>
+            <a:pPr algn="ctr"/>
+          </a:p>
+        </p:txBody>
+      </p:sp>
+      <p:sp>
+        <p:nvSpPr>
+          <p:cNvPr id="5" name="TextBox 4"/>
           <p:cNvSpPr txBox="1"/>
           <p:nvPr/>
         </p:nvSpPr>
@@ -6769,24 +6989,42 @@
           <a:p>
             <a:pPr>
               <a:spcAft>
-                <a:spcPts val="1080"/>
-              </a:spcAft>
-            </a:pPr>
-            <a:r>
-              <a:rPr sz="2400" b="0">
-                <a:solidFill>
-                  <a:srgbClr val="1F2A44"/>
-                </a:solidFill>
-                <a:latin typeface="Nunito Sans"/>
-              </a:rPr>
-              <a:t>Escalar = hacerse cada vez más grande.</a:t>
-            </a:r>
-          </a:p>
-        </p:txBody>
-      </p:sp>
-      <p:sp>
-        <p:nvSpPr>
-          <p:cNvPr id="5" name="TextBox 4"/>
+                <a:spcPts val="1260"/>
+              </a:spcAft>
+            </a:pPr>
+            <a:r>
+              <a:rPr sz="2800" b="1">
+                <a:solidFill>
+                  <a:srgbClr val="1F2A44"/>
+                </a:solidFill>
+                <a:latin typeface="Nunito Sans"/>
+              </a:rPr>
+              <a:t>Solemos llamar </a:t>
+            </a:r>
+            <a:r>
+              <a:rPr sz="2800" b="1">
+                <a:solidFill>
+                  <a:srgbClr val="1F2A44"/>
+                </a:solidFill>
+                <a:latin typeface="Nunito Sans"/>
+              </a:rPr>
+              <a:t>familia</a:t>
+            </a:r>
+            <a:r>
+              <a:rPr sz="2800" b="1">
+                <a:solidFill>
+                  <a:srgbClr val="1F2A44"/>
+                </a:solidFill>
+                <a:latin typeface="Nunito Sans"/>
+              </a:rPr>
+              <a:t> a personas unidas por el cuidado y un vínculo duradero: parentesco, pareja, adopción o acogida.</a:t>
+            </a:r>
+          </a:p>
+        </p:txBody>
+      </p:sp>
+      <p:sp>
+        <p:nvSpPr>
+          <p:cNvPr id="6" name="TextBox 5"/>
           <p:cNvSpPr txBox="1"/>
           <p:nvPr/>
         </p:nvSpPr>
@@ -6827,7 +7065,7 @@
                 </a:solidFill>
                 <a:latin typeface="Nunito Sans"/>
               </a:rPr>
-              <a:t>Sin cara:</a:t>
+              <a:t>Vínculo:</a:t>
             </a:r>
             <a:r>
               <a:rPr sz="2800" b="0">
@@ -6836,7 +7074,7 @@
                 </a:solidFill>
                 <a:latin typeface="Nunito Sans"/>
               </a:rPr>
-              <a:t> no ves si el otro se ríe o llora. Falta el tono.</a:t>
+              <a:t> una unión que dura en el tiempo</a:t>
             </a:r>
           </a:p>
           <a:p>
@@ -6861,7 +7099,7 @@
                 </a:solidFill>
                 <a:latin typeface="Nunito Sans"/>
               </a:rPr>
-              <a:t>Anonimato:</a:t>
+              <a:t>Cuidado:</a:t>
             </a:r>
             <a:r>
               <a:rPr sz="2800" b="0">
@@ -6870,7 +7108,7 @@
                 </a:solidFill>
                 <a:latin typeface="Nunito Sans"/>
               </a:rPr>
-              <a:t> detrás de una cuenta falsa, algunos se atreven a más.</a:t>
+              <a:t> se ocupan unos de otros</a:t>
             </a:r>
           </a:p>
           <a:p>
@@ -6889,56 +7127,13 @@
               <a:t>• </a:t>
             </a:r>
             <a:r>
-              <a:rPr sz="2800" b="1">
-                <a:solidFill>
-                  <a:srgbClr val="1F2A44"/>
-                </a:solidFill>
-                <a:latin typeface="Nunito Sans"/>
-              </a:rPr>
-              <a:t>Captura:</a:t>
-            </a:r>
-            <a:r>
               <a:rPr sz="2800" b="0">
                 <a:solidFill>
                   <a:srgbClr val="1F2A44"/>
                 </a:solidFill>
                 <a:latin typeface="Nunito Sans"/>
               </a:rPr>
-              <a:t> todo queda guardado y se puede reenviar, recortar o sacar de contexto.</a:t>
-            </a:r>
-          </a:p>
-          <a:p>
-            <a:pPr>
-              <a:spcAft>
-                <a:spcPts val="1260"/>
-              </a:spcAft>
-            </a:pPr>
-            <a:r>
-              <a:rPr sz="2800" b="1">
-                <a:solidFill>
-                  <a:srgbClr val="E8793A"/>
-                </a:solidFill>
-                <a:latin typeface="Nunito Sans"/>
-              </a:rPr>
-              <a:t>• </a:t>
-            </a:r>
-            <a:r>
-              <a:rPr sz="2800" b="1">
-                <a:solidFill>
-                  <a:srgbClr val="1F2A44"/>
-                </a:solidFill>
-                <a:latin typeface="Nunito Sans"/>
-              </a:rPr>
-              <a:t>Público:</a:t>
-            </a:r>
-            <a:r>
-              <a:rPr sz="2800" b="0">
-                <a:solidFill>
-                  <a:srgbClr val="1F2A44"/>
-                </a:solidFill>
-                <a:latin typeface="Nunito Sans"/>
-              </a:rPr>
-              <a:t> lo ve mucha gente, y cada «me gusta» anima a seguir.</a:t>
+              <a:t>La definición exacta está discutida: esta es una forma de verlo</a:t>
             </a:r>
           </a:p>
         </p:txBody>
@@ -7003,7 +7198,7 @@
                 </a:solidFill>
                 <a:latin typeface="Nunito Sans"/>
               </a:rPr>
-              <a:t>BLOQUE 1 · POR QUÉ EN LAS REDES SE ESCALA MÁS</a:t>
+              <a:t>BLOQUE 1 · MODELOS DE FAMILIA</a:t>
             </a:r>
           </a:p>
         </p:txBody>
@@ -7042,64 +7237,21 @@
                 </a:solidFill>
                 <a:latin typeface="Fredoka"/>
               </a:rPr>
-              <a:t>Ciberacoso</a:t>
-            </a:r>
-          </a:p>
-        </p:txBody>
-      </p:sp>
-      <p:sp>
-        <p:nvSpPr>
-          <p:cNvPr id="4" name="Rectangle 3"/>
-          <p:cNvSpPr/>
-          <p:nvPr/>
-        </p:nvSpPr>
-        <p:spPr>
-          <a:xfrm>
-            <a:off x="640000" y="1650000"/>
-            <a:ext cx="10912000" cy="1150000"/>
-          </a:xfrm>
-          <a:prstGeom prst="rect">
-            <a:avLst/>
-          </a:prstGeom>
-          <a:solidFill>
-            <a:srgbClr val="EAF0F7"/>
-          </a:solidFill>
-          <a:ln>
-            <a:noFill/>
-          </a:ln>
-        </p:spPr>
-        <p:style>
-          <a:lnRef idx="1">
-            <a:schemeClr val="accent1"/>
-          </a:lnRef>
-          <a:fillRef idx="3">
-            <a:schemeClr val="accent1"/>
-          </a:fillRef>
-          <a:effectRef idx="2">
-            <a:schemeClr val="accent1"/>
-          </a:effectRef>
-          <a:fontRef idx="minor">
-            <a:schemeClr val="lt1"/>
-          </a:fontRef>
-        </p:style>
-        <p:txBody>
-          <a:bodyPr rtlCol="0" anchor="ctr"/>
-          <a:lstStyle/>
-          <a:p>
-            <a:pPr algn="ctr"/>
-          </a:p>
-        </p:txBody>
-      </p:sp>
-      <p:sp>
-        <p:nvSpPr>
-          <p:cNvPr id="5" name="TextBox 4"/>
+              <a:t>Algunos modelos de familia</a:t>
+            </a:r>
+          </a:p>
+        </p:txBody>
+      </p:sp>
+      <p:sp>
+        <p:nvSpPr>
+          <p:cNvPr id="4" name="TextBox 3"/>
           <p:cNvSpPr txBox="1"/>
           <p:nvPr/>
         </p:nvSpPr>
         <p:spPr>
           <a:xfrm>
-            <a:off x="840000" y="1730000"/>
-            <a:ext cx="10512000" cy="1000000"/>
+            <a:off x="640000" y="1650000"/>
+            <a:ext cx="10912000" cy="4808000"/>
           </a:xfrm>
           <a:prstGeom prst="rect">
             <a:avLst/>
@@ -7107,45 +7259,6 @@
           <a:noFill/>
         </p:spPr>
         <p:txBody>
-          <a:bodyPr wrap="square" anchor="ctr">
-            <a:spAutoFit/>
-          </a:bodyPr>
-          <a:lstStyle/>
-          <a:p>
-            <a:pPr>
-              <a:spcAft>
-                <a:spcPts val="1260"/>
-              </a:spcAft>
-            </a:pPr>
-            <a:r>
-              <a:rPr sz="2800" b="1">
-                <a:solidFill>
-                  <a:srgbClr val="1F2A44"/>
-                </a:solidFill>
-                <a:latin typeface="Nunito Sans"/>
-              </a:rPr>
-              <a:t>Es hacer daño a alguien a propósito y de forma repetida usando el móvil, las redes o los videojuegos.</a:t>
-            </a:r>
-          </a:p>
-        </p:txBody>
-      </p:sp>
-      <p:sp>
-        <p:nvSpPr>
-          <p:cNvPr id="6" name="TextBox 5"/>
-          <p:cNvSpPr txBox="1"/>
-          <p:nvPr/>
-        </p:nvSpPr>
-        <p:spPr>
-          <a:xfrm>
-            <a:off x="640000" y="3000000"/>
-            <a:ext cx="10912000" cy="3458000"/>
-          </a:xfrm>
-          <a:prstGeom prst="rect">
-            <a:avLst/>
-          </a:prstGeom>
-          <a:noFill/>
-        </p:spPr>
-        <p:txBody>
           <a:bodyPr wrap="square">
             <a:spAutoFit/>
           </a:bodyPr>
@@ -7172,7 +7285,7 @@
                 </a:solidFill>
                 <a:latin typeface="Nunito Sans"/>
               </a:rPr>
-              <a:t>Intención</a:t>
+              <a:t>Nuclear:</a:t>
             </a:r>
             <a:r>
               <a:rPr sz="2800" b="0">
@@ -7181,7 +7294,7 @@
                 </a:solidFill>
                 <a:latin typeface="Nunito Sans"/>
               </a:rPr>
-              <a:t> de hacer daño</a:t>
+              <a:t> una madre y un padre con sus hijos</a:t>
             </a:r>
           </a:p>
           <a:p>
@@ -7206,7 +7319,7 @@
                 </a:solidFill>
                 <a:latin typeface="Nunito Sans"/>
               </a:rPr>
-              <a:t>Repetición:</a:t>
+              <a:t>Monoparental:</a:t>
             </a:r>
             <a:r>
               <a:rPr sz="2800" b="0">
@@ -7215,7 +7328,7 @@
                 </a:solidFill>
                 <a:latin typeface="Nunito Sans"/>
               </a:rPr>
-              <a:t> una publicación puede dañar una y otra vez</a:t>
+              <a:t> una madre o un padre solo con sus hijos</a:t>
             </a:r>
           </a:p>
           <a:p>
@@ -7240,7 +7353,7 @@
                 </a:solidFill>
                 <a:latin typeface="Nunito Sans"/>
               </a:rPr>
-              <a:t>Desequilibrio:</a:t>
+              <a:t>Reconstituida:</a:t>
             </a:r>
             <a:r>
               <a:rPr sz="2800" b="0">
@@ -7249,7 +7362,102 @@
                 </a:solidFill>
                 <a:latin typeface="Nunito Sans"/>
               </a:rPr>
-              <a:t> la víctima no puede defenderse fácilmente</a:t>
+              <a:t> una pareja con hijos de relaciones anteriores</a:t>
+            </a:r>
+          </a:p>
+          <a:p>
+            <a:pPr>
+              <a:spcAft>
+                <a:spcPts val="1260"/>
+              </a:spcAft>
+            </a:pPr>
+            <a:r>
+              <a:rPr sz="2800" b="1">
+                <a:solidFill>
+                  <a:srgbClr val="E8793A"/>
+                </a:solidFill>
+                <a:latin typeface="Nunito Sans"/>
+              </a:rPr>
+              <a:t>• </a:t>
+            </a:r>
+            <a:r>
+              <a:rPr sz="2800" b="1">
+                <a:solidFill>
+                  <a:srgbClr val="1F2A44"/>
+                </a:solidFill>
+                <a:latin typeface="Nunito Sans"/>
+              </a:rPr>
+              <a:t>Homoparental:</a:t>
+            </a:r>
+            <a:r>
+              <a:rPr sz="2800" b="0">
+                <a:solidFill>
+                  <a:srgbClr val="1F2A44"/>
+                </a:solidFill>
+                <a:latin typeface="Nunito Sans"/>
+              </a:rPr>
+              <a:t> dos madres o dos padres; en España, matrimonio legal desde 2005</a:t>
+            </a:r>
+          </a:p>
+          <a:p>
+            <a:pPr>
+              <a:spcAft>
+                <a:spcPts val="1260"/>
+              </a:spcAft>
+            </a:pPr>
+            <a:r>
+              <a:rPr sz="2800" b="1">
+                <a:solidFill>
+                  <a:srgbClr val="E8793A"/>
+                </a:solidFill>
+                <a:latin typeface="Nunito Sans"/>
+              </a:rPr>
+              <a:t>• </a:t>
+            </a:r>
+            <a:r>
+              <a:rPr sz="2800" b="0">
+                <a:solidFill>
+                  <a:srgbClr val="1F2A44"/>
+                </a:solidFill>
+                <a:latin typeface="Nunito Sans"/>
+              </a:rPr>
+              <a:t>Y también: </a:t>
+            </a:r>
+            <a:r>
+              <a:rPr sz="2800" b="1">
+                <a:solidFill>
+                  <a:srgbClr val="1F2A44"/>
+                </a:solidFill>
+                <a:latin typeface="Nunito Sans"/>
+              </a:rPr>
+              <a:t>extensa</a:t>
+            </a:r>
+            <a:r>
+              <a:rPr sz="2800" b="0">
+                <a:solidFill>
+                  <a:srgbClr val="1F2A44"/>
+                </a:solidFill>
+                <a:latin typeface="Nunito Sans"/>
+              </a:rPr>
+              <a:t> (con abuelos, tíos…), </a:t>
+            </a:r>
+            <a:r>
+              <a:rPr sz="2800" b="1">
+                <a:solidFill>
+                  <a:srgbClr val="1F2A44"/>
+                </a:solidFill>
+                <a:latin typeface="Nunito Sans"/>
+              </a:rPr>
+              <a:t>de acogida</a:t>
+            </a:r>
+            <a:r>
+              <a:rPr sz="2800" b="0">
+                <a:solidFill>
+                  <a:srgbClr val="1F2A44"/>
+                </a:solidFill>
+                <a:latin typeface="Nunito Sans"/>
+              </a:rPr>
+              <a:t>, sin hijos…</a:t>
             </a:r>
           </a:p>
         </p:txBody>
@@ -7314,7 +7522,7 @@
                 </a:solidFill>
                 <a:latin typeface="Nunito Sans"/>
               </a:rPr>
-              <a:t>BLOQUE 1 · POR QUÉ EN LAS REDES SE ESCALA MÁS</a:t>
+              <a:t>BLOQUE 1 · MODELOS DE FAMILIA</a:t>
             </a:r>
           </a:p>
         </p:txBody>
@@ -7353,248 +7561,179 @@
                 </a:solidFill>
                 <a:latin typeface="Fredoka"/>
               </a:rPr>
-              <a:t>Derechos y deberes en las redes</a:t>
-            </a:r>
-          </a:p>
-        </p:txBody>
-      </p:sp>
-      <p:graphicFrame>
-        <p:nvGraphicFramePr>
-          <p:cNvPr id="4" name="Table 3"/>
-          <p:cNvGraphicFramePr>
-            <a:graphicFrameLocks noGrp="1"/>
-          </p:cNvGraphicFramePr>
+              <a:t>¿Qué tienen en común?</a:t>
+            </a:r>
+          </a:p>
+        </p:txBody>
+      </p:sp>
+      <p:sp>
+        <p:nvSpPr>
+          <p:cNvPr id="4" name="TextBox 3"/>
+          <p:cNvSpPr txBox="1"/>
           <p:nvPr/>
-        </p:nvGraphicFramePr>
-        <p:xfrm>
-          <a:off x="640000" y="1700000"/>
-          <a:ext cx="10912000" cy="2400000"/>
-        </p:xfrm>
-        <a:graphic>
-          <a:graphicData uri="http://schemas.openxmlformats.org/drawingml/2006/table">
-            <a:tbl>
-              <a:tblPr firstRow="1" bandRow="1">
-                <a:tableStyleId>{5C22544A-7EE6-4342-B048-85BDC9FD1C3A}</a:tableStyleId>
-              </a:tblPr>
-              <a:tblGrid>
-                <a:gridCol w="5456000"/>
-                <a:gridCol w="5456000"/>
-              </a:tblGrid>
-              <a:tr h="600000">
-                <a:tc>
-                  <a:txBody>
-                    <a:bodyPr/>
-                    <a:lstStyle/>
-                    <a:p>
-                      <a:r>
-                        <a:rPr sz="2000" b="1">
-                          <a:solidFill>
-                            <a:srgbClr val="FBF7EF"/>
-                          </a:solidFill>
-                          <a:latin typeface="Fredoka"/>
-                        </a:rPr>
-                        <a:t>Tengo derecho a…</a:t>
-                      </a:r>
-                    </a:p>
-                  </a:txBody>
-                  <a:tcPr>
-                    <a:solidFill>
-                      <a:srgbClr val="1F2A44"/>
-                    </a:solidFill>
-                  </a:tcPr>
-                </a:tc>
-                <a:tc>
-                  <a:txBody>
-                    <a:bodyPr/>
-                    <a:lstStyle/>
-                    <a:p>
-                      <a:r>
-                        <a:rPr sz="2000" b="1">
-                          <a:solidFill>
-                            <a:srgbClr val="FBF7EF"/>
-                          </a:solidFill>
-                          <a:latin typeface="Fredoka"/>
-                        </a:rPr>
-                        <a:t>Por eso tengo el deber de…</a:t>
-                      </a:r>
-                    </a:p>
-                  </a:txBody>
-                  <a:tcPr>
-                    <a:solidFill>
-                      <a:srgbClr val="1F2A44"/>
-                    </a:solidFill>
-                  </a:tcPr>
-                </a:tc>
-              </a:tr>
-              <a:tr h="600000">
-                <a:tc>
-                  <a:txBody>
-                    <a:bodyPr/>
-                    <a:lstStyle/>
-                    <a:p>
-                      <a:r>
-                        <a:rPr sz="2000" b="1">
-                          <a:solidFill>
-                            <a:srgbClr val="1F2A44"/>
-                          </a:solidFill>
-                          <a:latin typeface="Nunito Sans"/>
-                        </a:rPr>
-                        <a:t>Privacidad:</a:t>
-                      </a:r>
-                      <a:r>
-                        <a:rPr sz="2000" b="0">
-                          <a:solidFill>
-                            <a:srgbClr val="1F2A44"/>
-                          </a:solidFill>
-                          <a:latin typeface="Nunito Sans"/>
-                        </a:rPr>
-                        <a:t> que mis mensajes privados sigan siendo privados</a:t>
-                      </a:r>
-                    </a:p>
-                  </a:txBody>
-                  <a:tcPr>
-                    <a:solidFill>
-                      <a:srgbClr val="FFFFFF"/>
-                    </a:solidFill>
-                  </a:tcPr>
-                </a:tc>
-                <a:tc>
-                  <a:txBody>
-                    <a:bodyPr/>
-                    <a:lstStyle/>
-                    <a:p>
-                      <a:r>
-                        <a:rPr sz="2000" b="0">
-                          <a:solidFill>
-                            <a:srgbClr val="1F2A44"/>
-                          </a:solidFill>
-                          <a:latin typeface="Nunito Sans"/>
-                        </a:rPr>
-                        <a:t>No reenviar capturas de chats privados de otros</a:t>
-                      </a:r>
-                    </a:p>
-                  </a:txBody>
-                  <a:tcPr>
-                    <a:solidFill>
-                      <a:srgbClr val="FFFFFF"/>
-                    </a:solidFill>
-                  </a:tcPr>
-                </a:tc>
-              </a:tr>
-              <a:tr h="600000">
-                <a:tc>
-                  <a:txBody>
-                    <a:bodyPr/>
-                    <a:lstStyle/>
-                    <a:p>
-                      <a:r>
-                        <a:rPr sz="2000" b="1">
-                          <a:solidFill>
-                            <a:srgbClr val="1F2A44"/>
-                          </a:solidFill>
-                          <a:latin typeface="Nunito Sans"/>
-                        </a:rPr>
-                        <a:t>Propia imagen:</a:t>
-                      </a:r>
-                      <a:r>
-                        <a:rPr sz="2000" b="0">
-                          <a:solidFill>
-                            <a:srgbClr val="1F2A44"/>
-                          </a:solidFill>
-                          <a:latin typeface="Nunito Sans"/>
-                        </a:rPr>
-                        <a:t> decidir dónde sale mi foto</a:t>
-                      </a:r>
-                    </a:p>
-                  </a:txBody>
-                  <a:tcPr>
-                    <a:solidFill>
-                      <a:srgbClr val="EAF0F7"/>
-                    </a:solidFill>
-                  </a:tcPr>
-                </a:tc>
-                <a:tc>
-                  <a:txBody>
-                    <a:bodyPr/>
-                    <a:lstStyle/>
-                    <a:p>
-                      <a:r>
-                        <a:rPr sz="2000" b="0">
-                          <a:solidFill>
-                            <a:srgbClr val="1F2A44"/>
-                          </a:solidFill>
-                          <a:latin typeface="Nunito Sans"/>
-                        </a:rPr>
-                        <a:t>Pedir permiso antes de subir fotos o vídeos de otros</a:t>
-                      </a:r>
-                    </a:p>
-                  </a:txBody>
-                  <a:tcPr>
-                    <a:solidFill>
-                      <a:srgbClr val="EAF0F7"/>
-                    </a:solidFill>
-                  </a:tcPr>
-                </a:tc>
-              </a:tr>
-              <a:tr h="600000">
-                <a:tc>
-                  <a:txBody>
-                    <a:bodyPr/>
-                    <a:lstStyle/>
-                    <a:p>
-                      <a:r>
-                        <a:rPr sz="2000" b="1">
-                          <a:solidFill>
-                            <a:srgbClr val="1F2A44"/>
-                          </a:solidFill>
-                          <a:latin typeface="Nunito Sans"/>
-                        </a:rPr>
-                        <a:t>Respeto:</a:t>
-                      </a:r>
-                      <a:r>
-                        <a:rPr sz="2000" b="0">
-                          <a:solidFill>
-                            <a:srgbClr val="1F2A44"/>
-                          </a:solidFill>
-                          <a:latin typeface="Nunito Sans"/>
-                        </a:rPr>
-                        <a:t> que no me insulten ni me humillen</a:t>
-                      </a:r>
-                    </a:p>
-                  </a:txBody>
-                  <a:tcPr>
-                    <a:solidFill>
-                      <a:srgbClr val="FFFFFF"/>
-                    </a:solidFill>
-                  </a:tcPr>
-                </a:tc>
-                <a:tc>
-                  <a:txBody>
-                    <a:bodyPr/>
-                    <a:lstStyle/>
-                    <a:p>
-                      <a:r>
-                        <a:rPr sz="2000" b="0">
-                          <a:solidFill>
-                            <a:srgbClr val="1F2A44"/>
-                          </a:solidFill>
-                          <a:latin typeface="Nunito Sans"/>
-                        </a:rPr>
-                        <a:t>No insultar ni humillar, aunque sea desde el anonimato</a:t>
-                      </a:r>
-                    </a:p>
-                  </a:txBody>
-                  <a:tcPr>
-                    <a:solidFill>
-                      <a:srgbClr val="FFFFFF"/>
-                    </a:solidFill>
-                  </a:tcPr>
-                </a:tc>
-              </a:tr>
-            </a:tbl>
-          </a:graphicData>
-        </a:graphic>
-      </p:graphicFrame>
+        </p:nvSpPr>
+        <p:spPr>
+          <a:xfrm>
+            <a:off x="640000" y="1650000"/>
+            <a:ext cx="10912000" cy="4808000"/>
+          </a:xfrm>
+          <a:prstGeom prst="rect">
+            <a:avLst/>
+          </a:prstGeom>
+          <a:noFill/>
+        </p:spPr>
+        <p:txBody>
+          <a:bodyPr wrap="square">
+            <a:spAutoFit/>
+          </a:bodyPr>
+          <a:lstStyle/>
+          <a:p>
+            <a:pPr>
+              <a:spcAft>
+                <a:spcPts val="1260"/>
+              </a:spcAft>
+            </a:pPr>
+            <a:r>
+              <a:rPr sz="2800" b="1">
+                <a:solidFill>
+                  <a:srgbClr val="E8793A"/>
+                </a:solidFill>
+                <a:latin typeface="Nunito Sans"/>
+              </a:rPr>
+              <a:t>• </a:t>
+            </a:r>
+            <a:r>
+              <a:rPr sz="2800" b="1">
+                <a:solidFill>
+                  <a:srgbClr val="1F2A44"/>
+                </a:solidFill>
+                <a:latin typeface="Nunito Sans"/>
+              </a:rPr>
+              <a:t>Cuidado:</a:t>
+            </a:r>
+            <a:r>
+              <a:rPr sz="2800" b="0">
+                <a:solidFill>
+                  <a:srgbClr val="1F2A44"/>
+                </a:solidFill>
+                <a:latin typeface="Nunito Sans"/>
+              </a:rPr>
+              <a:t> alguien se ocupa de ti: comida, salud, estudios, cariño</a:t>
+            </a:r>
+          </a:p>
+          <a:p>
+            <a:pPr>
+              <a:spcAft>
+                <a:spcPts val="1260"/>
+              </a:spcAft>
+            </a:pPr>
+            <a:r>
+              <a:rPr sz="2800" b="1">
+                <a:solidFill>
+                  <a:srgbClr val="E8793A"/>
+                </a:solidFill>
+                <a:latin typeface="Nunito Sans"/>
+              </a:rPr>
+              <a:t>• </a:t>
+            </a:r>
+            <a:r>
+              <a:rPr sz="2800" b="1">
+                <a:solidFill>
+                  <a:srgbClr val="1F2A44"/>
+                </a:solidFill>
+                <a:latin typeface="Nunito Sans"/>
+              </a:rPr>
+              <a:t>Vínculo:</a:t>
+            </a:r>
+            <a:r>
+              <a:rPr sz="2800" b="0">
+                <a:solidFill>
+                  <a:srgbClr val="1F2A44"/>
+                </a:solidFill>
+                <a:latin typeface="Nunito Sans"/>
+              </a:rPr>
+              <a:t> una relación que dura en el tiempo</a:t>
+            </a:r>
+          </a:p>
+          <a:p>
+            <a:pPr>
+              <a:spcAft>
+                <a:spcPts val="1260"/>
+              </a:spcAft>
+            </a:pPr>
+            <a:r>
+              <a:rPr sz="2800" b="1">
+                <a:solidFill>
+                  <a:srgbClr val="E8793A"/>
+                </a:solidFill>
+                <a:latin typeface="Nunito Sans"/>
+              </a:rPr>
+              <a:t>• </a:t>
+            </a:r>
+            <a:r>
+              <a:rPr sz="2800" b="1">
+                <a:solidFill>
+                  <a:srgbClr val="1F2A44"/>
+                </a:solidFill>
+                <a:latin typeface="Nunito Sans"/>
+              </a:rPr>
+              <a:t>Conflictos:</a:t>
+            </a:r>
+            <a:r>
+              <a:rPr sz="2800" b="0">
+                <a:solidFill>
+                  <a:srgbClr val="1F2A44"/>
+                </a:solidFill>
+                <a:latin typeface="Nunito Sans"/>
+              </a:rPr>
+              <a:t> en todas se discute, se negocian normas y se hacen las paces</a:t>
+            </a:r>
+          </a:p>
+          <a:p>
+            <a:pPr>
+              <a:spcAft>
+                <a:spcPts val="1260"/>
+              </a:spcAft>
+            </a:pPr>
+            <a:r>
+              <a:rPr sz="2800" b="1">
+                <a:solidFill>
+                  <a:srgbClr val="E8793A"/>
+                </a:solidFill>
+                <a:latin typeface="Nunito Sans"/>
+              </a:rPr>
+              <a:t>• </a:t>
+            </a:r>
+            <a:r>
+              <a:rPr sz="2800" b="0">
+                <a:solidFill>
+                  <a:srgbClr val="1F2A44"/>
+                </a:solidFill>
+                <a:latin typeface="Nunito Sans"/>
+              </a:rPr>
+              <a:t>La forma cambia; lo que cuenta es </a:t>
+            </a:r>
+            <a:r>
+              <a:rPr sz="2800" b="1">
+                <a:solidFill>
+                  <a:srgbClr val="1F2A44"/>
+                </a:solidFill>
+                <a:latin typeface="Nunito Sans"/>
+              </a:rPr>
+              <a:t>cómo</a:t>
+            </a:r>
+            <a:r>
+              <a:rPr sz="2800" b="0">
+                <a:solidFill>
+                  <a:srgbClr val="1F2A44"/>
+                </a:solidFill>
+                <a:latin typeface="Nunito Sans"/>
+              </a:rPr>
+              <a:t> se tratan</a:t>
+            </a:r>
+          </a:p>
+        </p:txBody>
+      </p:sp>
     </p:spTree>
   </p:cSld>
   <p:clrMapOvr>
